--- a/cursos/recursos/aperturas-y-defensas/09-apertura-italiana-y-variantes-modernas.pptx
+++ b/cursos/recursos/aperturas-y-defensas/09-apertura-italiana-y-variantes-modernas.pptx
@@ -1602,7 +1602,7 @@
                 <a:ea typeface="Calibri" pitchFamily="34" charset="-122"/>
                 <a:cs typeface="Calibri" pitchFamily="34" charset="-120"/>
               </a:rPr>
-              <a:t>1.e4 e5 2.Nf3 Nc6 3.Bc4 apunta directamente a f7.</a:t>
+              <a:t>1.e4 e5 2.Cf3 Cc6 3.Ac4 apunta directamente a f7.</a:t>
             </a:r>
             <a:endParaRPr lang="en-US" sz="1600" dirty="0"/>
           </a:p>
@@ -1626,7 +1626,7 @@
                 <a:ea typeface="Calibri" pitchFamily="34" charset="-122"/>
                 <a:cs typeface="Calibri" pitchFamily="34" charset="-120"/>
               </a:rPr>
-              <a:t>La línea moderna "Giuoco Pianissimo" (3...Bc5 4.c3 Nf6 5.d3) prioriza una lucha posicional lenta, mientras variantes como el Ataque Fried Liver buscan un asalto táctico inmediato sobre f7.</a:t>
+              <a:t>La línea moderna "Giuoco Pianissimo" (3...Ac5 4.c3 Cf6 5.d3) prioriza una lucha posicional lenta, mientras variantes como el Ataque Fried Liver buscan un asalto táctico inmediato sobre f7.</a:t>
             </a:r>
             <a:endParaRPr lang="en-US" sz="1600" dirty="0"/>
           </a:p>
